--- a/docs/quickguides/en/cars/pptx/15_Quick_Guide_oneSCM_HQ_Rolle_Blueprint_und_zentrale_Stammdaten_EN_Cars.pptx
+++ b/docs/quickguides/en/cars/pptx/15_Quick_Guide_oneSCM_HQ_Rolle_Blueprint_und_zentrale_Stammdaten_EN_Cars.pptx
@@ -1525,7 +1525,7 @@
                 <a:ea typeface="MB Corpo S Text Office" pitchFamily="34" charset="-122"/>
                 <a:cs typeface="MB Corpo S Text Office" pitchFamily="34" charset="-120"/>
               </a:rPr>
-              <a:t>This document is interactive – references to handbook chapters and systems are provided as links.</a:t>
+              <a:t>References to handbook chapters and systems are highlighted; e-mail addresses are provided as links.</a:t>
             </a:r>
             <a:endParaRPr lang="en-US" sz="900" dirty="0"/>
           </a:p>
@@ -1795,7 +1795,7 @@
                 <a:ea typeface="MB Corpo S Text Office" pitchFamily="34" charset="-122"/>
                 <a:cs typeface="MB Corpo S Text Office" pitchFamily="34" charset="-120"/>
               </a:rPr>
-              <a:t>Technical Options, SA matching and coverage codes</a:t>
+              <a:t>Technical options, SA matching, coverage and industry codes</a:t>
             </a:r>
             <a:endParaRPr lang="en-US" sz="900" dirty="0"/>
           </a:p>
@@ -2189,7 +2189,7 @@
         <p:spPr>
           <a:xfrm>
             <a:off x="5065776" y="4325112"/>
-            <a:ext cx="4645152" cy="1024128"/>
+            <a:ext cx="4645152" cy="1161288"/>
           </a:xfrm>
           <a:prstGeom prst="rect">
             <a:avLst/>
@@ -2361,18 +2361,18 @@
                 <a:ea typeface="MB Corpo S Text Office" pitchFamily="34" charset="-122"/>
                 <a:cs typeface="MB Corpo S Text Office" pitchFamily="34" charset="-120"/>
               </a:rPr>
-              <a:t>Technical Options, SA matching and coverage codes</a:t>
-            </a:r>
-            <a:r>
-              <a:rPr lang="en-US" sz="900" dirty="0">
-                <a:solidFill>
-                  <a:srgbClr val="262626"/>
-                </a:solidFill>
-                <a:latin typeface="MB Corpo S Text Office" pitchFamily="34" charset="0"/>
-                <a:ea typeface="MB Corpo S Text Office" pitchFamily="34" charset="-122"/>
-                <a:cs typeface="MB Corpo S Text Office" pitchFamily="34" charset="-120"/>
-              </a:rPr>
-              <a:t> centrally (15.7); they control product assignment and claiming of services.</a:t>
+              <a:t>technical options, SA matching, coverage and industry codes</a:t>
+            </a:r>
+            <a:r>
+              <a:rPr lang="en-US" sz="900" dirty="0">
+                <a:solidFill>
+                  <a:srgbClr val="262626"/>
+                </a:solidFill>
+                <a:latin typeface="MB Corpo S Text Office" pitchFamily="34" charset="0"/>
+                <a:ea typeface="MB Corpo S Text Office" pitchFamily="34" charset="-122"/>
+                <a:cs typeface="MB Corpo S Text Office" pitchFamily="34" charset="-120"/>
+              </a:rPr>
+              <a:t> centrally (15.7); they control product assignment and claiming of services. Markets appear in the language of the market settings.</a:t>
             </a:r>
             <a:endParaRPr lang="en-US" sz="900" dirty="0"/>
           </a:p>
@@ -3142,11 +3142,11 @@
         <p:spPr>
           <a:xfrm>
             <a:off x="201168" y="4242816"/>
-            <a:ext cx="4663440" cy="1170432"/>
+            <a:ext cx="4663440" cy="1316736"/>
           </a:xfrm>
           <a:prstGeom prst="roundRect">
             <a:avLst>
-              <a:gd name="adj" fmla="val 7813"/>
+              <a:gd name="adj" fmla="val 6944"/>
             </a:avLst>
           </a:prstGeom>
           <a:solidFill>
@@ -3210,7 +3210,7 @@
         <p:spPr>
           <a:xfrm>
             <a:off x="310896" y="4590288"/>
-            <a:ext cx="4480560" cy="768096"/>
+            <a:ext cx="4480560" cy="914400"/>
           </a:xfrm>
           <a:prstGeom prst="rect">
             <a:avLst/>
@@ -3259,7 +3259,7 @@
                 <a:ea typeface="MB Corpo S Text Office" pitchFamily="34" charset="-122"/>
                 <a:cs typeface="MB Corpo S Text Office" pitchFamily="34" charset="-120"/>
               </a:rPr>
-              <a:t>HQ approvals are traceable in the clarification register (Appendix F).</a:t>
+              <a:t>Group names of technical options are unique per division; the Blueprint wizard ends with the step "Overview &amp; Confirmation" (15.2, 15.7).</a:t>
             </a:r>
             <a:endParaRPr lang="en-US" sz="900" dirty="0"/>
           </a:p>
